--- a/media/exports/reports/2026-02/growth-trades.pptx
+++ b/media/exports/reports/2026-02/growth-trades.pptx
@@ -225,55 +225,55 @@
                 <c:formatCode>$#,##0;[Red]($#,##0);"-"</c:formatCode>
                 <c:ptCount val="17"/>
                 <c:pt idx="0">
-                  <c:v>171009</c:v>
+                  <c:v>191014</c:v>
                 </c:pt>
                 <c:pt idx="1">
-                  <c:v>179474</c:v>
+                  <c:v>200124</c:v>
                 </c:pt>
                 <c:pt idx="2">
-                  <c:v>143156</c:v>
+                  <c:v>159406</c:v>
                 </c:pt>
                 <c:pt idx="3">
-                  <c:v>140909</c:v>
+                  <c:v>156794</c:v>
                 </c:pt>
                 <c:pt idx="4">
-                  <c:v>160943</c:v>
+                  <c:v>179190</c:v>
                 </c:pt>
                 <c:pt idx="5">
-                  <c:v>135082</c:v>
+                  <c:v>150465</c:v>
                 </c:pt>
                 <c:pt idx="6">
-                  <c:v>124705</c:v>
+                  <c:v>138865</c:v>
                 </c:pt>
                 <c:pt idx="7">
-                  <c:v>129816</c:v>
+                  <c:v>144649</c:v>
                 </c:pt>
                 <c:pt idx="8">
-                  <c:v>164113</c:v>
+                  <c:v>183265</c:v>
                 </c:pt>
                 <c:pt idx="9">
-                  <c:v>186760</c:v>
+                  <c:v>208588</c:v>
                 </c:pt>
                 <c:pt idx="10">
-                  <c:v>139164</c:v>
+                  <c:v>155118</c:v>
                 </c:pt>
                 <c:pt idx="11">
-                  <c:v>128255</c:v>
+                  <c:v>143077</c:v>
                 </c:pt>
                 <c:pt idx="12">
-                  <c:v>128898</c:v>
+                  <c:v>143566</c:v>
                 </c:pt>
                 <c:pt idx="13">
-                  <c:v>174786</c:v>
+                  <c:v>194966</c:v>
                 </c:pt>
                 <c:pt idx="14">
-                  <c:v>135079</c:v>
+                  <c:v>150283</c:v>
                 </c:pt>
                 <c:pt idx="15">
-                  <c:v>164780</c:v>
+                  <c:v>183306</c:v>
                 </c:pt>
                 <c:pt idx="16">
-                  <c:v>196372</c:v>
+                  <c:v>218908</c:v>
                 </c:pt>
               </c:numCache>
             </c:numRef>
@@ -495,55 +495,55 @@
                 <c:formatCode>$#,##0;[Red]($#,##0);"-"</c:formatCode>
                 <c:ptCount val="17"/>
                 <c:pt idx="0">
-                  <c:v>24670</c:v>
+                  <c:v>27650</c:v>
                 </c:pt>
                 <c:pt idx="1">
-                  <c:v>24670</c:v>
+                  <c:v>27650</c:v>
                 </c:pt>
                 <c:pt idx="2">
-                  <c:v>24670</c:v>
+                  <c:v>27650</c:v>
                 </c:pt>
                 <c:pt idx="3">
-                  <c:v>24670</c:v>
+                  <c:v>27650</c:v>
                 </c:pt>
                 <c:pt idx="4">
-                  <c:v>27930</c:v>
+                  <c:v>31300</c:v>
                 </c:pt>
                 <c:pt idx="5">
-                  <c:v>27930</c:v>
+                  <c:v>31300</c:v>
                 </c:pt>
                 <c:pt idx="6">
-                  <c:v>27930</c:v>
+                  <c:v>31300</c:v>
                 </c:pt>
                 <c:pt idx="7">
-                  <c:v>27930</c:v>
+                  <c:v>31300</c:v>
                 </c:pt>
                 <c:pt idx="8">
-                  <c:v>31870</c:v>
+                  <c:v>35720</c:v>
                 </c:pt>
                 <c:pt idx="9">
-                  <c:v>33200</c:v>
+                  <c:v>37200</c:v>
                 </c:pt>
                 <c:pt idx="10">
-                  <c:v>33200</c:v>
+                  <c:v>37200</c:v>
                 </c:pt>
                 <c:pt idx="11">
-                  <c:v>33200</c:v>
+                  <c:v>37200</c:v>
                 </c:pt>
                 <c:pt idx="12">
-                  <c:v>35800</c:v>
+                  <c:v>40100</c:v>
                 </c:pt>
                 <c:pt idx="13">
-                  <c:v>35800</c:v>
+                  <c:v>40100</c:v>
                 </c:pt>
                 <c:pt idx="14">
-                  <c:v>35800</c:v>
+                  <c:v>40100</c:v>
                 </c:pt>
                 <c:pt idx="15">
-                  <c:v>35800</c:v>
+                  <c:v>40100</c:v>
                 </c:pt>
                 <c:pt idx="16">
-                  <c:v>37500</c:v>
+                  <c:v>42000</c:v>
                 </c:pt>
               </c:numCache>
             </c:numRef>
@@ -592,7 +592,7 @@
         <c:axId val="-2100718248"/>
         <c:scaling>
           <c:orientation val="minMax"/>
-          <c:max val="40000.0"/>
+          <c:max val="50000.0"/>
           <c:min val="0.0"/>
         </c:scaling>
         <c:delete val="0"/>
@@ -765,55 +765,55 @@
                 <c:formatCode>$#,##0;[Red]($#,##0);"-"</c:formatCode>
                 <c:ptCount val="17"/>
                 <c:pt idx="0">
+                  <c:v>141600</c:v>
+                </c:pt>
+                <c:pt idx="1">
+                  <c:v>147100</c:v>
+                </c:pt>
+                <c:pt idx="2">
+                  <c:v>103700</c:v>
+                </c:pt>
+                <c:pt idx="3">
+                  <c:v>100100</c:v>
+                </c:pt>
+                <c:pt idx="4">
+                  <c:v>118600</c:v>
+                </c:pt>
+                <c:pt idx="5">
+                  <c:v>96400</c:v>
+                </c:pt>
+                <c:pt idx="6">
+                  <c:v>83900</c:v>
+                </c:pt>
+                <c:pt idx="7">
+                  <c:v>89900</c:v>
+                </c:pt>
+                <c:pt idx="8">
                   <c:v>126300</c:v>
                 </c:pt>
-                <c:pt idx="1">
-                  <c:v>131400</c:v>
-                </c:pt>
-                <c:pt idx="2">
-                  <c:v>92600</c:v>
-                </c:pt>
-                <c:pt idx="3">
-                  <c:v>89400</c:v>
-                </c:pt>
-                <c:pt idx="4">
-                  <c:v>106000</c:v>
-                </c:pt>
-                <c:pt idx="5">
-                  <c:v>86100</c:v>
-                </c:pt>
-                <c:pt idx="6">
-                  <c:v>74900</c:v>
-                </c:pt>
-                <c:pt idx="7">
-                  <c:v>80300</c:v>
-                </c:pt>
-                <c:pt idx="8">
-                  <c:v>112700</c:v>
-                </c:pt>
                 <c:pt idx="9">
-                  <c:v>135800</c:v>
+                  <c:v>152100</c:v>
                 </c:pt>
                 <c:pt idx="10">
-                  <c:v>86200</c:v>
+                  <c:v>96500</c:v>
                 </c:pt>
                 <c:pt idx="11">
-                  <c:v>75100</c:v>
+                  <c:v>84200</c:v>
                 </c:pt>
                 <c:pt idx="12">
-                  <c:v>70800</c:v>
+                  <c:v>79300</c:v>
                 </c:pt>
                 <c:pt idx="13">
-                  <c:v>113300</c:v>
+                  <c:v>126900</c:v>
                 </c:pt>
                 <c:pt idx="14">
-                  <c:v>69700</c:v>
+                  <c:v>78100</c:v>
                 </c:pt>
                 <c:pt idx="15">
-                  <c:v>97500</c:v>
+                  <c:v>109100</c:v>
                 </c:pt>
                 <c:pt idx="16">
-                  <c:v>129300</c:v>
+                  <c:v>144800</c:v>
                 </c:pt>
               </c:numCache>
             </c:numRef>
@@ -862,7 +862,7 @@
         <c:axId val="-2100718248"/>
         <c:scaling>
           <c:orientation val="minMax"/>
-          <c:max val="150000.0"/>
+          <c:max val="200000.0"/>
           <c:min val="0.0"/>
         </c:scaling>
         <c:delete val="0"/>
@@ -1035,55 +1035,55 @@
                 <c:formatCode>$#,##0;[Red]($#,##0);"-"</c:formatCode>
                 <c:ptCount val="17"/>
                 <c:pt idx="0">
-                  <c:v>20039</c:v>
+                  <c:v>21764</c:v>
                 </c:pt>
                 <c:pt idx="1">
-                  <c:v>23404</c:v>
+                  <c:v>25374</c:v>
                 </c:pt>
                 <c:pt idx="2">
-                  <c:v>25886</c:v>
+                  <c:v>28056</c:v>
                 </c:pt>
                 <c:pt idx="3">
-                  <c:v>26839</c:v>
+                  <c:v>29044</c:v>
                 </c:pt>
                 <c:pt idx="4">
-                  <c:v>27013</c:v>
+                  <c:v>29290</c:v>
                 </c:pt>
                 <c:pt idx="5">
-                  <c:v>21052</c:v>
+                  <c:v>22765</c:v>
                 </c:pt>
                 <c:pt idx="6">
-                  <c:v>21875</c:v>
+                  <c:v>23665</c:v>
                 </c:pt>
                 <c:pt idx="7">
-                  <c:v>21586</c:v>
+                  <c:v>23449</c:v>
                 </c:pt>
                 <c:pt idx="8">
-                  <c:v>19543</c:v>
+                  <c:v>21245</c:v>
                 </c:pt>
                 <c:pt idx="9">
-                  <c:v>17760</c:v>
+                  <c:v>19288</c:v>
                 </c:pt>
                 <c:pt idx="10">
-                  <c:v>19764</c:v>
+                  <c:v>21418</c:v>
                 </c:pt>
                 <c:pt idx="11">
-                  <c:v>19955</c:v>
+                  <c:v>21677</c:v>
                 </c:pt>
                 <c:pt idx="12">
-                  <c:v>22298</c:v>
+                  <c:v>24166</c:v>
                 </c:pt>
                 <c:pt idx="13">
-                  <c:v>25686</c:v>
+                  <c:v>27966</c:v>
                 </c:pt>
                 <c:pt idx="14">
-                  <c:v>29579</c:v>
+                  <c:v>32083</c:v>
                 </c:pt>
                 <c:pt idx="15">
-                  <c:v>31480</c:v>
+                  <c:v>34106</c:v>
                 </c:pt>
                 <c:pt idx="16">
-                  <c:v>29572</c:v>
+                  <c:v>32108</c:v>
                 </c:pt>
               </c:numCache>
             </c:numRef>
@@ -1657,7 +1657,7 @@
           <a:lstStyle/>
           <a:p>
             <a:r>
-              <a:t>Trades · All. February against February last year: 22.0%; Year to date (Jul to Feb 2026): $1,254,094; Gross margin, year to date: 37.3%. Revenue is $1,254,094 this financial year to date (Jul to Feb 2026). Maintenance contracts make the highest gross margin (59.5%); Installations the lowest (27.7%). The business needs 27.7% gross margin just to cover overheads. Installations: 27.7% gross margin, 7.3 points under the 35.0% target: about $56,427 on $777,700 of revenue this financial year to date. It's below the 27.7% needed to cover overheads, too. Maintenance contracts: 59.5% gross margin, 24.5 points over the 35.0% target ($68,635 ahead on $280,300 this financial year to date).</a:t>
+              <a:t>Trades · All. February against February last year: 22.2%; Year to date (Jul to Feb 2026): $1,397,812; Gross margin, year to date: 43.8%. Revenue is $1,397,812 this financial year to date (Jul to Feb 2026). Maintenance contracts make the highest gross margin (63.8%); Installations the lowest (35.5%). The business needs 33.0% gross margin just to cover overheads. Installations: 35.5% gross margin, 0.5 points over the 35.0% target ($4,218 ahead on $871,000 this financial year to date). Maintenance contracts: 63.8% gross margin, 28.8 points over the 35.0% target ($90,540 ahead on $314,000 this financial year to date).</a:t>
             </a:r>
           </a:p>
         </p:txBody>
@@ -1727,7 +1727,7 @@
           <a:lstStyle/>
           <a:p>
             <a:r>
-              <a:t>Trades · Maintenance contracts. February against February last year: 34.3%; Year to date (Jul to Feb 2026): $280,300; Gross margin, year to date: 59.5%. Maintenance contracts brought in $280,300 this financial year to date, at a 59.5% gross margin (above the 37.3% overall). Maintenance contracts: 59.5% gross margin, 24.5 points over the 35.0% target ($68,635 ahead on $280,300 this financial year to date).</a:t>
+              <a:t>Trades · Maintenance contracts. February against February last year: 34.2%; Year to date (Jul to Feb 2026): $314,000; Gross margin, year to date: 63.8%. Maintenance contracts brought in $314,000 this financial year to date, at a 63.8% gross margin (above the 43.8% overall). Maintenance contracts: 63.8% gross margin, 28.8 points over the 35.0% target ($90,540 ahead on $314,000 this financial year to date).</a:t>
             </a:r>
           </a:p>
         </p:txBody>
@@ -1797,7 +1797,7 @@
           <a:lstStyle/>
           <a:p>
             <a:r>
-              <a:t>Trades · Installations. February against February last year: 22.0%; Year to date (Jul to Feb 2026): $777,700; Gross margin, year to date: 27.7%. Installations brought in $777,700 this financial year to date, at a 27.7% gross margin (below the 37.3% overall). Installations: 27.7% gross margin, 7.3 points under the 35.0% target: about $56,427 on $777,700 of revenue this financial year to date. It's below the 27.7% needed to cover overheads, too.</a:t>
+              <a:t>Trades · Installations. February against February last year: 22.1%; Year to date (Jul to Feb 2026): $871,000; Gross margin, year to date: 35.5%. Installations brought in $871,000 this financial year to date, at a 35.5% gross margin (below the 43.8% overall). Installations: 35.5% gross margin, 0.5 points over the 35.0% target ($4,218 ahead on $871,000 this financial year to date).</a:t>
             </a:r>
           </a:p>
         </p:txBody>
@@ -1867,7 +1867,7 @@
           <a:lstStyle/>
           <a:p>
             <a:r>
-              <a:t>Trades · Call-outs and repairs. February against February last year: 9.5%; Year to date (Jul to Feb 2026): $196,094; Gross margin, year to date: 43.7%. Call-outs and repairs brought in $196,094 this financial year to date, at a 43.7% gross margin (above the 37.3% overall). Call-outs and repairs: 43.7% gross margin, 8.7 points over the 35.0% target ($17,043 ahead on $196,094 this financial year to date).</a:t>
+              <a:t>Trades · Call-outs and repairs. February against February last year: 9.6%; Year to date (Jul to Feb 2026): $212,812; Gross margin, year to date: 48.1%. Call-outs and repairs brought in $212,812 this financial year to date, at a 48.1% gross margin (above the 43.8% overall). Call-outs and repairs: 48.1% gross margin, 13.1 points over the 35.0% target ($27,910 ahead on $212,812 this financial year to date).</a:t>
             </a:r>
           </a:p>
         </p:txBody>
@@ -1937,7 +1937,7 @@
           <a:lstStyle/>
           <a:p>
             <a:r>
-              <a:t>By line: financial year to date (Jul to Feb 2026) against the same period last year · Trades. Same period last year: Not available: the data starts October 2024. From gross margin to profit: February's jobs made $75,710 gross margin (38.6%). Technician time not charged to jobs took ($4,832) and overheads $59,320, leaving $21,222 profit before tax (10.8% of revenue). To cover overheads, jobs need a 27.7% gross margin on average.</a:t>
+              <a:t>By line: financial year to date (Jul to Feb 2026) against the same period last year · Trades. Same period last year: Not available: the data starts October 2024. From gross margin to profit: February's jobs made $98,246 gross margin (44.9%). Technician time not charged to jobs took $12,920 and overheads $59,320, leaving $26,006 profit before tax (11.9% of revenue). To cover overheads, jobs need a 33.0% gross margin on average.</a:t>
             </a:r>
           </a:p>
         </p:txBody>
@@ -5352,7 +5352,7 @@
                 </a:solidFill>
                 <a:latin typeface="Roboto"/>
               </a:rPr>
-              <a:t>Data retrieved 2pm, Tue 6 Oct 2026 · Generated 8 Oct 2026, 9:35am · Sample data · Made with Python (python-pptx)</a:t>
+              <a:t>Data retrieved 2pm, Tue 6 Oct 2026 · Generated 9 Oct 2026, 8:41am · Sample data · Made with Python (python-pptx)</a:t>
             </a:r>
           </a:p>
         </p:txBody>
@@ -5698,7 +5698,7 @@
                 </a:solidFill>
                 <a:latin typeface="Roboto"/>
               </a:rPr>
-              <a:t>22.0%</a:t>
+              <a:t>22.2%</a:t>
             </a:r>
           </a:p>
         </p:txBody>
@@ -5737,7 +5737,7 @@
                 </a:solidFill>
                 <a:latin typeface="Roboto"/>
               </a:rPr>
-              <a:t>$196,372 against $160,943</a:t>
+              <a:t>$218,908 against $179,190</a:t>
             </a:r>
           </a:p>
         </p:txBody>
@@ -5864,7 +5864,7 @@
                 </a:solidFill>
                 <a:latin typeface="Roboto"/>
               </a:rPr>
-              <a:t>$1,254,094</a:t>
+              <a:t>$1,397,812</a:t>
             </a:r>
           </a:p>
         </p:txBody>
@@ -6030,7 +6030,7 @@
                 </a:solidFill>
                 <a:latin typeface="Roboto"/>
               </a:rPr>
-              <a:t>37.3%</a:t>
+              <a:t>43.8%</a:t>
             </a:r>
           </a:p>
         </p:txBody>
@@ -6069,7 +6069,7 @@
                 </a:solidFill>
                 <a:latin typeface="Roboto"/>
               </a:rPr>
-              <a:t>$468,184 before overheads</a:t>
+              <a:t>$611,902 before overheads</a:t>
             </a:r>
           </a:p>
         </p:txBody>
@@ -6084,7 +6084,7 @@
         </p:nvGraphicFramePr>
         <p:xfrm>
           <a:off x="457200" y="2604516"/>
-          <a:ext cx="11277295" cy="2119884"/>
+          <a:ext cx="11277295" cy="2318004"/>
         </p:xfrm>
         <a:graphic>
           <a:graphicData uri="http://schemas.openxmlformats.org/drawingml/2006/chart">
@@ -6100,8 +6100,8 @@
         </p:nvSpPr>
         <p:spPr>
           <a:xfrm>
-            <a:off x="457200" y="4815840"/>
-            <a:ext cx="5501487" cy="1493520"/>
+            <a:off x="457200" y="5013960"/>
+            <a:ext cx="5501487" cy="1295400"/>
           </a:xfrm>
           <a:prstGeom prst="rect">
             <a:avLst/>
@@ -6149,7 +6149,7 @@
         </p:nvSpPr>
         <p:spPr>
           <a:xfrm>
-            <a:off x="594360" y="4870704"/>
+            <a:off x="594360" y="5068824"/>
             <a:ext cx="5227167" cy="274320"/>
           </a:xfrm>
           <a:prstGeom prst="rect">
@@ -6188,8 +6188,8 @@
         </p:nvSpPr>
         <p:spPr>
           <a:xfrm>
-            <a:off x="594360" y="5145024"/>
-            <a:ext cx="5227167" cy="1127760"/>
+            <a:off x="594360" y="5343144"/>
+            <a:ext cx="5227167" cy="929640"/>
           </a:xfrm>
           <a:prstGeom prst="rect">
             <a:avLst/>
@@ -6214,7 +6214,7 @@
                 </a:solidFill>
                 <a:latin typeface="Roboto"/>
               </a:rPr>
-              <a:t>Revenue is $1,254,094 this financial year to date (Jul to Feb 2026). Maintenance contracts make the highest gross margin (59.5%); Installations the lowest (27.7%). The business needs 27.7% gross margin just to cover overheads.</a:t>
+              <a:t>Revenue is $1,397,812 this financial year to date (Jul to Feb 2026). Maintenance contracts make the highest gross margin (63.8%); Installations the lowest (35.5%). The business needs 33.0% gross margin just to cover overheads.</a:t>
             </a:r>
           </a:p>
         </p:txBody>
@@ -6227,8 +6227,8 @@
         </p:nvSpPr>
         <p:spPr>
           <a:xfrm>
-            <a:off x="6233007" y="4815840"/>
-            <a:ext cx="5501487" cy="1493520"/>
+            <a:off x="6233007" y="5013960"/>
+            <a:ext cx="5501487" cy="1295400"/>
           </a:xfrm>
           <a:prstGeom prst="rect">
             <a:avLst/>
@@ -6276,7 +6276,7 @@
         </p:nvSpPr>
         <p:spPr>
           <a:xfrm>
-            <a:off x="6370167" y="4870704"/>
+            <a:off x="6370167" y="5068824"/>
             <a:ext cx="5227167" cy="274320"/>
           </a:xfrm>
           <a:prstGeom prst="rect">
@@ -6315,8 +6315,8 @@
         </p:nvSpPr>
         <p:spPr>
           <a:xfrm>
-            <a:off x="6370167" y="5145024"/>
-            <a:ext cx="5227167" cy="1127760"/>
+            <a:off x="6370167" y="5343144"/>
+            <a:ext cx="5227167" cy="929640"/>
           </a:xfrm>
           <a:prstGeom prst="rect">
             <a:avLst/>
@@ -6341,7 +6341,7 @@
                 </a:solidFill>
                 <a:latin typeface="Roboto"/>
               </a:rPr>
-              <a:t>Installations: 27.7% gross margin, 7.3 points under the 35.0% target: about $56,427 on $777,700 of revenue this financial year to date. It's below the 27.7% needed to cover overheads, too. Maintenance contracts: 59.5% gross margin, 24.5 points over the 35.0% target ($68,635 ahead on $280,300 this financial year to date).</a:t>
+              <a:t>Installations: 35.5% gross margin, 0.5 points over the 35.0% target ($4,218 ahead on $871,000 this financial year to date). Maintenance contracts: 63.8% gross margin, 28.8 points over the 35.0% target ($90,540 ahead on $314,000 this financial year to date).</a:t>
             </a:r>
           </a:p>
         </p:txBody>
@@ -6419,7 +6419,7 @@
                 </a:solidFill>
                 <a:latin typeface="Roboto"/>
               </a:rPr>
-              <a:t>Data retrieved 2pm, Tue 6 Oct 2026 · Generated 8 Oct 2026, 9:35am · Sample data · Made with Python (python-pptx)</a:t>
+              <a:t>Data retrieved 2pm, Tue 6 Oct 2026 · Generated 9 Oct 2026, 8:41am · Sample data · Made with Python (python-pptx)</a:t>
             </a:r>
           </a:p>
         </p:txBody>
@@ -6765,7 +6765,7 @@
                 </a:solidFill>
                 <a:latin typeface="Roboto"/>
               </a:rPr>
-              <a:t>34.3%</a:t>
+              <a:t>34.2%</a:t>
             </a:r>
           </a:p>
         </p:txBody>
@@ -6804,7 +6804,7 @@
                 </a:solidFill>
                 <a:latin typeface="Roboto"/>
               </a:rPr>
-              <a:t>$37,500 against $27,930</a:t>
+              <a:t>$42,000 against $31,300</a:t>
             </a:r>
           </a:p>
         </p:txBody>
@@ -6931,7 +6931,7 @@
                 </a:solidFill>
                 <a:latin typeface="Roboto"/>
               </a:rPr>
-              <a:t>$280,300</a:t>
+              <a:t>$314,000</a:t>
             </a:r>
           </a:p>
         </p:txBody>
@@ -7097,7 +7097,7 @@
                 </a:solidFill>
                 <a:latin typeface="Roboto"/>
               </a:rPr>
-              <a:t>59.5%</a:t>
+              <a:t>63.8%</a:t>
             </a:r>
           </a:p>
         </p:txBody>
@@ -7136,7 +7136,7 @@
                 </a:solidFill>
                 <a:latin typeface="Roboto"/>
               </a:rPr>
-              <a:t>$166,740 before overheads</a:t>
+              <a:t>$200,440 before overheads</a:t>
             </a:r>
           </a:p>
         </p:txBody>
@@ -7281,7 +7281,7 @@
                 </a:solidFill>
                 <a:latin typeface="Roboto"/>
               </a:rPr>
-              <a:t>Maintenance contracts brought in $280,300 this financial year to date, at a 59.5% gross margin (above the 37.3% overall).</a:t>
+              <a:t>Maintenance contracts brought in $314,000 this financial year to date, at a 63.8% gross margin (above the 43.8% overall).</a:t>
             </a:r>
           </a:p>
         </p:txBody>
@@ -7408,7 +7408,7 @@
                 </a:solidFill>
                 <a:latin typeface="Roboto"/>
               </a:rPr>
-              <a:t>Maintenance contracts: 59.5% gross margin, 24.5 points over the 35.0% target ($68,635 ahead on $280,300 this financial year to date).</a:t>
+              <a:t>Maintenance contracts: 63.8% gross margin, 28.8 points over the 35.0% target ($90,540 ahead on $314,000 this financial year to date).</a:t>
             </a:r>
           </a:p>
         </p:txBody>
@@ -7486,7 +7486,7 @@
                 </a:solidFill>
                 <a:latin typeface="Roboto"/>
               </a:rPr>
-              <a:t>Data retrieved 2pm, Tue 6 Oct 2026 · Generated 8 Oct 2026, 9:35am · Sample data · Made with Python (python-pptx)</a:t>
+              <a:t>Data retrieved 2pm, Tue 6 Oct 2026 · Generated 9 Oct 2026, 8:41am · Sample data · Made with Python (python-pptx)</a:t>
             </a:r>
           </a:p>
         </p:txBody>
@@ -7832,7 +7832,7 @@
                 </a:solidFill>
                 <a:latin typeface="Roboto"/>
               </a:rPr>
-              <a:t>22.0%</a:t>
+              <a:t>22.1%</a:t>
             </a:r>
           </a:p>
         </p:txBody>
@@ -7871,7 +7871,7 @@
                 </a:solidFill>
                 <a:latin typeface="Roboto"/>
               </a:rPr>
-              <a:t>$129,300 against $106,000</a:t>
+              <a:t>$144,800 against $118,600</a:t>
             </a:r>
           </a:p>
         </p:txBody>
@@ -7998,7 +7998,7 @@
                 </a:solidFill>
                 <a:latin typeface="Roboto"/>
               </a:rPr>
-              <a:t>$777,700</a:t>
+              <a:t>$871,000</a:t>
             </a:r>
           </a:p>
         </p:txBody>
@@ -8164,7 +8164,7 @@
                 </a:solidFill>
                 <a:latin typeface="Roboto"/>
               </a:rPr>
-              <a:t>27.7%</a:t>
+              <a:t>35.5%</a:t>
             </a:r>
           </a:p>
         </p:txBody>
@@ -8203,7 +8203,7 @@
                 </a:solidFill>
                 <a:latin typeface="Roboto"/>
               </a:rPr>
-              <a:t>$215,768 before overheads</a:t>
+              <a:t>$309,068 before overheads</a:t>
             </a:r>
           </a:p>
         </p:txBody>
@@ -8218,7 +8218,7 @@
         </p:nvGraphicFramePr>
         <p:xfrm>
           <a:off x="457200" y="2604516"/>
-          <a:ext cx="11277295" cy="2516124"/>
+          <a:ext cx="11277295" cy="2714244"/>
         </p:xfrm>
         <a:graphic>
           <a:graphicData uri="http://schemas.openxmlformats.org/drawingml/2006/chart">
@@ -8234,8 +8234,8 @@
         </p:nvSpPr>
         <p:spPr>
           <a:xfrm>
-            <a:off x="457200" y="5212080"/>
-            <a:ext cx="5501487" cy="1097280"/>
+            <a:off x="457200" y="5410200"/>
+            <a:ext cx="5501487" cy="899160"/>
           </a:xfrm>
           <a:prstGeom prst="rect">
             <a:avLst/>
@@ -8283,7 +8283,7 @@
         </p:nvSpPr>
         <p:spPr>
           <a:xfrm>
-            <a:off x="594360" y="5266944"/>
+            <a:off x="594360" y="5465064"/>
             <a:ext cx="5227167" cy="274320"/>
           </a:xfrm>
           <a:prstGeom prst="rect">
@@ -8322,8 +8322,8 @@
         </p:nvSpPr>
         <p:spPr>
           <a:xfrm>
-            <a:off x="594360" y="5541264"/>
-            <a:ext cx="5227167" cy="731520"/>
+            <a:off x="594360" y="5739384"/>
+            <a:ext cx="5227167" cy="533400"/>
           </a:xfrm>
           <a:prstGeom prst="rect">
             <a:avLst/>
@@ -8348,7 +8348,7 @@
                 </a:solidFill>
                 <a:latin typeface="Roboto"/>
               </a:rPr>
-              <a:t>Installations brought in $777,700 this financial year to date, at a 27.7% gross margin (below the 37.3% overall).</a:t>
+              <a:t>Installations brought in $871,000 this financial year to date, at a 35.5% gross margin (below the 43.8% overall).</a:t>
             </a:r>
           </a:p>
         </p:txBody>
@@ -8361,8 +8361,8 @@
         </p:nvSpPr>
         <p:spPr>
           <a:xfrm>
-            <a:off x="6233007" y="5212080"/>
-            <a:ext cx="5501487" cy="1097280"/>
+            <a:off x="6233007" y="5410200"/>
+            <a:ext cx="5501487" cy="899160"/>
           </a:xfrm>
           <a:prstGeom prst="rect">
             <a:avLst/>
@@ -8410,7 +8410,7 @@
         </p:nvSpPr>
         <p:spPr>
           <a:xfrm>
-            <a:off x="6370167" y="5266944"/>
+            <a:off x="6370167" y="5465064"/>
             <a:ext cx="5227167" cy="274320"/>
           </a:xfrm>
           <a:prstGeom prst="rect">
@@ -8449,8 +8449,8 @@
         </p:nvSpPr>
         <p:spPr>
           <a:xfrm>
-            <a:off x="6370167" y="5541264"/>
-            <a:ext cx="5227167" cy="731520"/>
+            <a:off x="6370167" y="5739384"/>
+            <a:ext cx="5227167" cy="533400"/>
           </a:xfrm>
           <a:prstGeom prst="rect">
             <a:avLst/>
@@ -8475,7 +8475,7 @@
                 </a:solidFill>
                 <a:latin typeface="Roboto"/>
               </a:rPr>
-              <a:t>Installations: 27.7% gross margin, 7.3 points under the 35.0% target: about $56,427 on $777,700 of revenue this financial year to date. It's below the 27.7% needed to cover overheads, too.</a:t>
+              <a:t>Installations: 35.5% gross margin, 0.5 points over the 35.0% target ($4,218 ahead on $871,000 this financial year to date).</a:t>
             </a:r>
           </a:p>
         </p:txBody>
@@ -8553,7 +8553,7 @@
                 </a:solidFill>
                 <a:latin typeface="Roboto"/>
               </a:rPr>
-              <a:t>Data retrieved 2pm, Tue 6 Oct 2026 · Generated 8 Oct 2026, 9:35am · Sample data · Made with Python (python-pptx)</a:t>
+              <a:t>Data retrieved 2pm, Tue 6 Oct 2026 · Generated 9 Oct 2026, 8:41am · Sample data · Made with Python (python-pptx)</a:t>
             </a:r>
           </a:p>
         </p:txBody>
@@ -8899,7 +8899,7 @@
                 </a:solidFill>
                 <a:latin typeface="Roboto"/>
               </a:rPr>
-              <a:t>9.5%</a:t>
+              <a:t>9.6%</a:t>
             </a:r>
           </a:p>
         </p:txBody>
@@ -8938,7 +8938,7 @@
                 </a:solidFill>
                 <a:latin typeface="Roboto"/>
               </a:rPr>
-              <a:t>$29,572 against $27,013</a:t>
+              <a:t>$32,108 against $29,290</a:t>
             </a:r>
           </a:p>
         </p:txBody>
@@ -9065,7 +9065,7 @@
                 </a:solidFill>
                 <a:latin typeface="Roboto"/>
               </a:rPr>
-              <a:t>$196,094</a:t>
+              <a:t>$212,812</a:t>
             </a:r>
           </a:p>
         </p:txBody>
@@ -9231,7 +9231,7 @@
                 </a:solidFill>
                 <a:latin typeface="Roboto"/>
               </a:rPr>
-              <a:t>43.7%</a:t>
+              <a:t>48.1%</a:t>
             </a:r>
           </a:p>
         </p:txBody>
@@ -9270,7 +9270,7 @@
                 </a:solidFill>
                 <a:latin typeface="Roboto"/>
               </a:rPr>
-              <a:t>$85,676 before overheads</a:t>
+              <a:t>$102,394 before overheads</a:t>
             </a:r>
           </a:p>
         </p:txBody>
@@ -9415,7 +9415,7 @@
                 </a:solidFill>
                 <a:latin typeface="Roboto"/>
               </a:rPr>
-              <a:t>Call-outs and repairs brought in $196,094 this financial year to date, at a 43.7% gross margin (above the 37.3% overall).</a:t>
+              <a:t>Call-outs and repairs brought in $212,812 this financial year to date, at a 48.1% gross margin (above the 43.8% overall).</a:t>
             </a:r>
           </a:p>
         </p:txBody>
@@ -9542,7 +9542,7 @@
                 </a:solidFill>
                 <a:latin typeface="Roboto"/>
               </a:rPr>
-              <a:t>Call-outs and repairs: 43.7% gross margin, 8.7 points over the 35.0% target ($17,043 ahead on $196,094 this financial year to date).</a:t>
+              <a:t>Call-outs and repairs: 48.1% gross margin, 13.1 points over the 35.0% target ($27,910 ahead on $212,812 this financial year to date).</a:t>
             </a:r>
           </a:p>
         </p:txBody>
@@ -9620,7 +9620,7 @@
                 </a:solidFill>
                 <a:latin typeface="Roboto"/>
               </a:rPr>
-              <a:t>Data retrieved 2pm, Tue 6 Oct 2026 · Generated 8 Oct 2026, 9:35am · Sample data · Made with Python (python-pptx)</a:t>
+              <a:t>Data retrieved 2pm, Tue 6 Oct 2026 · Generated 9 Oct 2026, 8:41am · Sample data · Made with Python (python-pptx)</a:t>
             </a:r>
           </a:p>
         </p:txBody>
@@ -9839,7 +9839,7 @@
                 </a:solidFill>
                 <a:latin typeface="Roboto"/>
               </a:rPr>
-              <a:t>Same period last year: Not available: the data starts October 2024. From gross margin to profit: February's jobs made $75,710 gross margin (38.6%). Technician time not charged to jobs took ($4,832) and overheads $59,320, leaving $21,222 profit before tax (10.8% of revenue). To cover overheads, jobs need a 27.7% gross margin on average.</a:t>
+              <a:t>Same period last year: Not available: the data starts October 2024. From gross margin to profit: February's jobs made $98,246 gross margin (44.9%). Technician time not charged to jobs took $12,920 and overheads $59,320, leaving $26,006 profit before tax (11.9% of revenue). To cover overheads, jobs need a 33.0% gross margin on average.</a:t>
             </a:r>
           </a:p>
         </p:txBody>
@@ -10070,7 +10070,7 @@
                           </a:solidFill>
                           <a:latin typeface="Roboto"/>
                         </a:rPr>
-                        <a:t>$280,300</a:t>
+                        <a:t>$314,000</a:t>
                       </a:r>
                     </a:p>
                   </a:txBody>
@@ -10151,7 +10151,7 @@
                           </a:solidFill>
                           <a:latin typeface="Roboto"/>
                         </a:rPr>
-                        <a:t>$166,740</a:t>
+                        <a:t>$200,440</a:t>
                       </a:r>
                     </a:p>
                   </a:txBody>
@@ -10178,7 +10178,7 @@
                           </a:solidFill>
                           <a:latin typeface="Roboto"/>
                         </a:rPr>
-                        <a:t>59.5%</a:t>
+                        <a:t>63.8%</a:t>
                       </a:r>
                     </a:p>
                   </a:txBody>
@@ -10234,7 +10234,7 @@
                           </a:solidFill>
                           <a:latin typeface="Roboto"/>
                         </a:rPr>
-                        <a:t>$777,700</a:t>
+                        <a:t>$871,000</a:t>
                       </a:r>
                     </a:p>
                   </a:txBody>
@@ -10315,7 +10315,7 @@
                           </a:solidFill>
                           <a:latin typeface="Roboto"/>
                         </a:rPr>
-                        <a:t>$215,768</a:t>
+                        <a:t>$309,068</a:t>
                       </a:r>
                     </a:p>
                   </a:txBody>
@@ -10342,7 +10342,7 @@
                           </a:solidFill>
                           <a:latin typeface="Roboto"/>
                         </a:rPr>
-                        <a:t>27.7%</a:t>
+                        <a:t>35.5%</a:t>
                       </a:r>
                     </a:p>
                   </a:txBody>
@@ -10398,7 +10398,7 @@
                           </a:solidFill>
                           <a:latin typeface="Roboto"/>
                         </a:rPr>
-                        <a:t>$196,094</a:t>
+                        <a:t>$212,812</a:t>
                       </a:r>
                     </a:p>
                   </a:txBody>
@@ -10479,7 +10479,7 @@
                           </a:solidFill>
                           <a:latin typeface="Roboto"/>
                         </a:rPr>
-                        <a:t>$85,676</a:t>
+                        <a:t>$102,394</a:t>
                       </a:r>
                     </a:p>
                   </a:txBody>
@@ -10506,7 +10506,7 @@
                           </a:solidFill>
                           <a:latin typeface="Roboto"/>
                         </a:rPr>
-                        <a:t>43.7%</a:t>
+                        <a:t>48.1%</a:t>
                       </a:r>
                     </a:p>
                   </a:txBody>
@@ -10562,7 +10562,7 @@
                           </a:solidFill>
                           <a:latin typeface="Roboto"/>
                         </a:rPr>
-                        <a:t>$1,254,094</a:t>
+                        <a:t>$1,397,812</a:t>
                       </a:r>
                     </a:p>
                   </a:txBody>
@@ -10643,7 +10643,7 @@
                           </a:solidFill>
                           <a:latin typeface="Roboto"/>
                         </a:rPr>
-                        <a:t>$468,184</a:t>
+                        <a:t>$611,902</a:t>
                       </a:r>
                     </a:p>
                   </a:txBody>
@@ -10670,7 +10670,7 @@
                           </a:solidFill>
                           <a:latin typeface="Roboto"/>
                         </a:rPr>
-                        <a:t>37.3%</a:t>
+                        <a:t>43.8%</a:t>
                       </a:r>
                     </a:p>
                   </a:txBody>
@@ -10758,7 +10758,7 @@
                 </a:solidFill>
                 <a:latin typeface="Roboto"/>
               </a:rPr>
-              <a:t>Data retrieved 2pm, Tue 6 Oct 2026 · Generated 8 Oct 2026, 9:35am · Sample data · Made with Python (python-pptx)</a:t>
+              <a:t>Data retrieved 2pm, Tue 6 Oct 2026 · Generated 9 Oct 2026, 8:41am · Sample data · Made with Python (python-pptx)</a:t>
             </a:r>
           </a:p>
         </p:txBody>
